--- a/prompt_engineering/pe-1-basics_Tokenization_Hallucinations_PromptFormula_v2.pptx
+++ b/prompt_engineering/pe-1-basics_Tokenization_Hallucinations_PromptFormula_v2.pptx
@@ -244,7 +244,7 @@
           <a:p>
             <a:fld id="{7BAEECA8-D063-486F-AE31-5020270C1449}" type="datetimeFigureOut">
               <a:rPr lang="en-US" smtClean="0"/>
-              <a:t>5/25/2026</a:t>
+              <a:t>7/2/2026</a:t>
             </a:fld>
             <a:endParaRPr lang="en-US"/>
           </a:p>
@@ -421,7 +421,7 @@
           <a:p>
             <a:fld id="{073EEAA7-AFB7-4D13-AC6E-D387B4394DA4}" type="datetimeFigureOut">
               <a:rPr lang="en-IN" smtClean="0"/>
-              <a:t>25-05-2026</a:t>
+              <a:t>02-07-2026</a:t>
             </a:fld>
             <a:endParaRPr lang="en-IN"/>
           </a:p>
@@ -1136,7 +1136,7 @@
           <a:p>
             <a:fld id="{6383FAE1-13DE-4511-8C1B-C8AFB720664C}" type="datetimeFigureOut">
               <a:rPr lang="en-US" smtClean="0"/>
-              <a:t>5/25/2026</a:t>
+              <a:t>7/2/2026</a:t>
             </a:fld>
             <a:endParaRPr lang="en-US"/>
           </a:p>
@@ -1334,7 +1334,7 @@
           <a:p>
             <a:fld id="{6383FAE1-13DE-4511-8C1B-C8AFB720664C}" type="datetimeFigureOut">
               <a:rPr lang="en-US" smtClean="0"/>
-              <a:t>5/25/2026</a:t>
+              <a:t>7/2/2026</a:t>
             </a:fld>
             <a:endParaRPr lang="en-US"/>
           </a:p>
@@ -1542,7 +1542,7 @@
           <a:p>
             <a:fld id="{6383FAE1-13DE-4511-8C1B-C8AFB720664C}" type="datetimeFigureOut">
               <a:rPr lang="en-US" smtClean="0"/>
-              <a:t>5/25/2026</a:t>
+              <a:t>7/2/2026</a:t>
             </a:fld>
             <a:endParaRPr lang="en-US"/>
           </a:p>
@@ -1740,7 +1740,7 @@
           <a:p>
             <a:fld id="{6383FAE1-13DE-4511-8C1B-C8AFB720664C}" type="datetimeFigureOut">
               <a:rPr lang="en-US" smtClean="0"/>
-              <a:t>5/25/2026</a:t>
+              <a:t>7/2/2026</a:t>
             </a:fld>
             <a:endParaRPr lang="en-US"/>
           </a:p>
@@ -2015,7 +2015,7 @@
           <a:p>
             <a:fld id="{6383FAE1-13DE-4511-8C1B-C8AFB720664C}" type="datetimeFigureOut">
               <a:rPr lang="en-US" smtClean="0"/>
-              <a:t>5/25/2026</a:t>
+              <a:t>7/2/2026</a:t>
             </a:fld>
             <a:endParaRPr lang="en-US"/>
           </a:p>
@@ -2280,7 +2280,7 @@
           <a:p>
             <a:fld id="{6383FAE1-13DE-4511-8C1B-C8AFB720664C}" type="datetimeFigureOut">
               <a:rPr lang="en-US" smtClean="0"/>
-              <a:t>5/25/2026</a:t>
+              <a:t>7/2/2026</a:t>
             </a:fld>
             <a:endParaRPr lang="en-US"/>
           </a:p>
@@ -2692,7 +2692,7 @@
           <a:p>
             <a:fld id="{6383FAE1-13DE-4511-8C1B-C8AFB720664C}" type="datetimeFigureOut">
               <a:rPr lang="en-US" smtClean="0"/>
-              <a:t>5/25/2026</a:t>
+              <a:t>7/2/2026</a:t>
             </a:fld>
             <a:endParaRPr lang="en-US"/>
           </a:p>
@@ -2833,7 +2833,7 @@
           <a:p>
             <a:fld id="{6383FAE1-13DE-4511-8C1B-C8AFB720664C}" type="datetimeFigureOut">
               <a:rPr lang="en-US" smtClean="0"/>
-              <a:t>5/25/2026</a:t>
+              <a:t>7/2/2026</a:t>
             </a:fld>
             <a:endParaRPr lang="en-US"/>
           </a:p>
@@ -2946,7 +2946,7 @@
           <a:p>
             <a:fld id="{6383FAE1-13DE-4511-8C1B-C8AFB720664C}" type="datetimeFigureOut">
               <a:rPr lang="en-US" smtClean="0"/>
-              <a:t>5/25/2026</a:t>
+              <a:t>7/2/2026</a:t>
             </a:fld>
             <a:endParaRPr lang="en-US"/>
           </a:p>
@@ -3257,7 +3257,7 @@
           <a:p>
             <a:fld id="{6383FAE1-13DE-4511-8C1B-C8AFB720664C}" type="datetimeFigureOut">
               <a:rPr lang="en-US" smtClean="0"/>
-              <a:t>5/25/2026</a:t>
+              <a:t>7/2/2026</a:t>
             </a:fld>
             <a:endParaRPr lang="en-US"/>
           </a:p>
@@ -3548,7 +3548,7 @@
           <a:p>
             <a:fld id="{6383FAE1-13DE-4511-8C1B-C8AFB720664C}" type="datetimeFigureOut">
               <a:rPr lang="en-US" smtClean="0"/>
-              <a:t>5/25/2026</a:t>
+              <a:t>7/2/2026</a:t>
             </a:fld>
             <a:endParaRPr lang="en-US"/>
           </a:p>
@@ -3792,7 +3792,7 @@
           <a:p>
             <a:fld id="{6383FAE1-13DE-4511-8C1B-C8AFB720664C}" type="datetimeFigureOut">
               <a:rPr lang="en-US" smtClean="0"/>
-              <a:t>5/25/2026</a:t>
+              <a:t>7/2/2026</a:t>
             </a:fld>
             <a:endParaRPr lang="en-US"/>
           </a:p>
@@ -4653,8 +4653,8 @@
         </p:nvSpPr>
         <p:spPr>
           <a:xfrm>
-            <a:off x="325152" y="958125"/>
-            <a:ext cx="11232864" cy="4154984"/>
+            <a:off x="233712" y="647078"/>
+            <a:ext cx="11232864" cy="6370975"/>
           </a:xfrm>
           <a:prstGeom prst="rect">
             <a:avLst/>
@@ -4755,16 +4755,6 @@
             </a:endParaRPr>
           </a:p>
           <a:p>
-            <a:endParaRPr lang="en-US" sz="2400" dirty="0">
-              <a:solidFill>
-                <a:schemeClr val="accent6">
-                  <a:lumMod val="60000"/>
-                  <a:lumOff val="40000"/>
-                </a:schemeClr>
-              </a:solidFill>
-            </a:endParaRPr>
-          </a:p>
-          <a:p>
             <a:r>
               <a:rPr lang="en-US" sz="2400" u="sng" dirty="0">
                 <a:solidFill>
@@ -4787,51 +4777,81 @@
                   </a:schemeClr>
                 </a:solidFill>
               </a:rPr>
-              <a:t>Explain Type 2 diabetes for </a:t>
-            </a:r>
-            <a:r>
-              <a:rPr lang="en-US" sz="2400" b="1" u="sng" dirty="0">
-                <a:solidFill>
-                  <a:schemeClr val="accent6">
-                    <a:lumMod val="60000"/>
-                    <a:lumOff val="40000"/>
-                  </a:schemeClr>
-                </a:solidFill>
-              </a:rPr>
-              <a:t>class 11 students</a:t>
-            </a:r>
-            <a:r>
-              <a:rPr lang="en-US" sz="2400" dirty="0">
-                <a:solidFill>
-                  <a:schemeClr val="accent6">
-                    <a:lumMod val="60000"/>
-                    <a:lumOff val="40000"/>
-                  </a:schemeClr>
-                </a:solidFill>
-              </a:rPr>
-              <a:t> in 100 words. The students are all </a:t>
-            </a:r>
-            <a:r>
-              <a:rPr lang="en-US" sz="2400" b="1" u="sng" dirty="0">
-                <a:solidFill>
-                  <a:schemeClr val="accent6">
-                    <a:lumMod val="60000"/>
-                    <a:lumOff val="40000"/>
-                  </a:schemeClr>
-                </a:solidFill>
-              </a:rPr>
-              <a:t>majoring in biology</a:t>
-            </a:r>
-            <a:r>
-              <a:rPr lang="en-US" sz="2400" dirty="0">
-                <a:solidFill>
-                  <a:schemeClr val="accent6">
-                    <a:lumMod val="60000"/>
-                    <a:lumOff val="40000"/>
-                  </a:schemeClr>
-                </a:solidFill>
-              </a:rPr>
-              <a:t>. </a:t>
+              <a:t>You are a high school biology textbook author. </a:t>
+            </a:r>
+          </a:p>
+          <a:p>
+            <a:r>
+              <a:rPr lang="en-US" sz="2400" dirty="0">
+                <a:solidFill>
+                  <a:schemeClr val="accent6">
+                    <a:lumMod val="60000"/>
+                    <a:lumOff val="40000"/>
+                  </a:schemeClr>
+                </a:solidFill>
+              </a:rPr>
+              <a:t>Explain Type 2 diabetes for class 11 students in exactly 100 words. The students are all majoring in biology.</a:t>
+            </a:r>
+          </a:p>
+          <a:p>
+            <a:r>
+              <a:rPr lang="en-US" sz="2400" dirty="0">
+                <a:solidFill>
+                  <a:schemeClr val="accent6">
+                    <a:lumMod val="60000"/>
+                    <a:lumOff val="40000"/>
+                  </a:schemeClr>
+                </a:solidFill>
+              </a:rPr>
+              <a:t>Constraints to reduce hallucination:</a:t>
+            </a:r>
+          </a:p>
+          <a:p>
+            <a:pPr marL="457200" indent="-457200">
+              <a:buAutoNum type="arabicPeriod"/>
+            </a:pPr>
+            <a:r>
+              <a:rPr lang="en-US" sz="2400" dirty="0">
+                <a:solidFill>
+                  <a:schemeClr val="accent6">
+                    <a:lumMod val="60000"/>
+                    <a:lumOff val="40000"/>
+                  </a:schemeClr>
+                </a:solidFill>
+              </a:rPr>
+              <a:t>Base your explanation strictly on standard, globally accepted medical guidelines (like the WHO or ADA). </a:t>
+            </a:r>
+          </a:p>
+          <a:p>
+            <a:pPr marL="457200" indent="-457200">
+              <a:buAutoNum type="arabicPeriod"/>
+            </a:pPr>
+            <a:r>
+              <a:rPr lang="en-US" sz="2400" dirty="0">
+                <a:solidFill>
+                  <a:schemeClr val="accent6">
+                    <a:lumMod val="60000"/>
+                    <a:lumOff val="40000"/>
+                  </a:schemeClr>
+                </a:solidFill>
+              </a:rPr>
+              <a:t>If a specific physiological mechanism is still scientifically debated or unknown, do not speculate; stick only to proven facts.</a:t>
+            </a:r>
+          </a:p>
+          <a:p>
+            <a:pPr marL="457200" indent="-457200">
+              <a:buAutoNum type="arabicPeriod"/>
+            </a:pPr>
+            <a:r>
+              <a:rPr lang="en-US" sz="2400" dirty="0">
+                <a:solidFill>
+                  <a:schemeClr val="accent6">
+                    <a:lumMod val="60000"/>
+                    <a:lumOff val="40000"/>
+                  </a:schemeClr>
+                </a:solidFill>
+              </a:rPr>
+              <a:t>No Filler: Do not include introductory sentences. Start directly with the definition.</a:t>
             </a:r>
           </a:p>
         </p:txBody>
@@ -4929,7 +4949,7 @@
         </p:nvSpPr>
         <p:spPr>
           <a:xfrm>
-            <a:off x="334296" y="1305597"/>
+            <a:off x="224028" y="921549"/>
             <a:ext cx="11232864" cy="1938992"/>
           </a:xfrm>
           <a:prstGeom prst="rect">
@@ -5046,8 +5066,8 @@
         </p:nvSpPr>
         <p:spPr>
           <a:xfrm>
-            <a:off x="224028" y="4144232"/>
-            <a:ext cx="10703052" cy="1938992"/>
+            <a:off x="170363" y="3705320"/>
+            <a:ext cx="10703052" cy="2308324"/>
           </a:xfrm>
           <a:prstGeom prst="rect">
             <a:avLst/>
@@ -5106,6 +5126,41 @@
                 </a:solidFill>
               </a:rPr>
               <a:t>What is the cure for Type 2 diabetes. If unsure, say "I don’t know". </a:t>
+            </a:r>
+          </a:p>
+          <a:p>
+            <a:r>
+              <a:rPr lang="en-US" sz="2400" dirty="0">
+                <a:solidFill>
+                  <a:schemeClr val="accent6">
+                    <a:lumMod val="60000"/>
+                    <a:lumOff val="40000"/>
+                  </a:schemeClr>
+                </a:solidFill>
+              </a:rPr>
+              <a:t>Use following source to answer: &lt;</a:t>
+            </a:r>
+            <a:r>
+              <a:rPr lang="en-US" sz="2400" dirty="0" err="1">
+                <a:solidFill>
+                  <a:schemeClr val="accent6">
+                    <a:lumMod val="60000"/>
+                    <a:lumOff val="40000"/>
+                  </a:schemeClr>
+                </a:solidFill>
+              </a:rPr>
+              <a:t>source_text</a:t>
+            </a:r>
+            <a:r>
+              <a:rPr lang="en-US" sz="2400" dirty="0">
+                <a:solidFill>
+                  <a:schemeClr val="accent6">
+                    <a:lumMod val="60000"/>
+                    <a:lumOff val="40000"/>
+                  </a:schemeClr>
+                </a:solidFill>
+              </a:rPr>
+              <a:t>&gt; </a:t>
             </a:r>
           </a:p>
           <a:p>
@@ -6720,7 +6775,20 @@
                   </a:schemeClr>
                 </a:solidFill>
               </a:rPr>
-              <a:t>Better Prompt: "You are a board-certified cardiologist with 20 years of experience. Based on clinical emergency protocols, what is the step-by-step procedure for a patient experiencing a sudden resting heart rate over 120 BPM? If you are unsure of specific diagnostic criteria, state that you cannot provide medical advice for that detail."</a:t>
+              <a:t>Better Prompt: "You are a board-certified cardiologist with 20 years of experience. </a:t>
+            </a:r>
+          </a:p>
+          <a:p>
+            <a:r>
+              <a:rPr lang="en-US" sz="2400" dirty="0">
+                <a:solidFill>
+                  <a:schemeClr val="accent6">
+                    <a:lumMod val="60000"/>
+                    <a:lumOff val="40000"/>
+                  </a:schemeClr>
+                </a:solidFill>
+              </a:rPr>
+              <a:t>Based on clinical emergency protocols, what is the step-by-step procedure for a patient experiencing a sudden resting heart rate over 120 BPM? If you are unsure of specific diagnostic criteria, state that you cannot provide medical advice for that detail."</a:t>
             </a:r>
           </a:p>
           <a:p>
@@ -7373,7 +7441,7 @@
                   </a:schemeClr>
                 </a:solidFill>
               </a:rPr>
-              <a:t>AI sees:  [101, 1045, 2293, 3698, 4083, 102]</a:t>
+              <a:t>AI sees         :  [101, 1045, 2293, 3698, 4083, 102]</a:t>
             </a:r>
           </a:p>
         </p:txBody>
@@ -10214,7 +10282,7 @@
         </p:nvSpPr>
         <p:spPr>
           <a:xfrm>
-            <a:off x="235967" y="171161"/>
+            <a:off x="290048" y="25360"/>
             <a:ext cx="11611903" cy="6832640"/>
           </a:xfrm>
           <a:prstGeom prst="rect">
@@ -11513,7 +11581,7 @@
         <p:spPr>
           <a:xfrm>
             <a:off x="690372" y="4580466"/>
-            <a:ext cx="7758684" cy="1938992"/>
+            <a:ext cx="7758684" cy="1569660"/>
           </a:xfrm>
           <a:prstGeom prst="rect">
             <a:avLst/>
@@ -11587,22 +11655,6 @@
                 </a:schemeClr>
               </a:solidFill>
             </a:endParaRPr>
-          </a:p>
-          <a:p>
-            <a:pPr>
-              <a:buNone/>
-            </a:pPr>
-            <a:r>
-              <a:rPr lang="en-US" sz="2400" dirty="0">
-                <a:solidFill>
-                  <a:schemeClr val="accent6">
-                    <a:lumMod val="60000"/>
-                    <a:lumOff val="40000"/>
-                  </a:schemeClr>
-                </a:solidFill>
-              </a:rPr>
-              <a:t>AI is predicting text, NOT verifying facts.</a:t>
-            </a:r>
           </a:p>
         </p:txBody>
       </p:sp>
@@ -11780,7 +11832,7 @@
                   </a:schemeClr>
                 </a:solidFill>
               </a:rPr>
-              <a:t>, not truth.</a:t>
+              <a:t>, not truth. It is not verifying.</a:t>
             </a:r>
           </a:p>
           <a:p>

--- a/prompt_engineering/pe-1-basics_Tokenization_Hallucinations_PromptFormula_v2.pptx
+++ b/prompt_engineering/pe-1-basics_Tokenization_Hallucinations_PromptFormula_v2.pptx
@@ -244,7 +244,7 @@
           <a:p>
             <a:fld id="{7BAEECA8-D063-486F-AE31-5020270C1449}" type="datetimeFigureOut">
               <a:rPr lang="en-US" smtClean="0"/>
-              <a:t>7/2/2026</a:t>
+              <a:t>7/14/2026</a:t>
             </a:fld>
             <a:endParaRPr lang="en-US"/>
           </a:p>
@@ -421,7 +421,7 @@
           <a:p>
             <a:fld id="{073EEAA7-AFB7-4D13-AC6E-D387B4394DA4}" type="datetimeFigureOut">
               <a:rPr lang="en-IN" smtClean="0"/>
-              <a:t>02-07-2026</a:t>
+              <a:t>14-07-2026</a:t>
             </a:fld>
             <a:endParaRPr lang="en-IN"/>
           </a:p>
@@ -1136,7 +1136,7 @@
           <a:p>
             <a:fld id="{6383FAE1-13DE-4511-8C1B-C8AFB720664C}" type="datetimeFigureOut">
               <a:rPr lang="en-US" smtClean="0"/>
-              <a:t>7/2/2026</a:t>
+              <a:t>7/14/2026</a:t>
             </a:fld>
             <a:endParaRPr lang="en-US"/>
           </a:p>
@@ -1334,7 +1334,7 @@
           <a:p>
             <a:fld id="{6383FAE1-13DE-4511-8C1B-C8AFB720664C}" type="datetimeFigureOut">
               <a:rPr lang="en-US" smtClean="0"/>
-              <a:t>7/2/2026</a:t>
+              <a:t>7/14/2026</a:t>
             </a:fld>
             <a:endParaRPr lang="en-US"/>
           </a:p>
@@ -1542,7 +1542,7 @@
           <a:p>
             <a:fld id="{6383FAE1-13DE-4511-8C1B-C8AFB720664C}" type="datetimeFigureOut">
               <a:rPr lang="en-US" smtClean="0"/>
-              <a:t>7/2/2026</a:t>
+              <a:t>7/14/2026</a:t>
             </a:fld>
             <a:endParaRPr lang="en-US"/>
           </a:p>
@@ -1740,7 +1740,7 @@
           <a:p>
             <a:fld id="{6383FAE1-13DE-4511-8C1B-C8AFB720664C}" type="datetimeFigureOut">
               <a:rPr lang="en-US" smtClean="0"/>
-              <a:t>7/2/2026</a:t>
+              <a:t>7/14/2026</a:t>
             </a:fld>
             <a:endParaRPr lang="en-US"/>
           </a:p>
@@ -2015,7 +2015,7 @@
           <a:p>
             <a:fld id="{6383FAE1-13DE-4511-8C1B-C8AFB720664C}" type="datetimeFigureOut">
               <a:rPr lang="en-US" smtClean="0"/>
-              <a:t>7/2/2026</a:t>
+              <a:t>7/14/2026</a:t>
             </a:fld>
             <a:endParaRPr lang="en-US"/>
           </a:p>
@@ -2280,7 +2280,7 @@
           <a:p>
             <a:fld id="{6383FAE1-13DE-4511-8C1B-C8AFB720664C}" type="datetimeFigureOut">
               <a:rPr lang="en-US" smtClean="0"/>
-              <a:t>7/2/2026</a:t>
+              <a:t>7/14/2026</a:t>
             </a:fld>
             <a:endParaRPr lang="en-US"/>
           </a:p>
@@ -2692,7 +2692,7 @@
           <a:p>
             <a:fld id="{6383FAE1-13DE-4511-8C1B-C8AFB720664C}" type="datetimeFigureOut">
               <a:rPr lang="en-US" smtClean="0"/>
-              <a:t>7/2/2026</a:t>
+              <a:t>7/14/2026</a:t>
             </a:fld>
             <a:endParaRPr lang="en-US"/>
           </a:p>
@@ -2833,7 +2833,7 @@
           <a:p>
             <a:fld id="{6383FAE1-13DE-4511-8C1B-C8AFB720664C}" type="datetimeFigureOut">
               <a:rPr lang="en-US" smtClean="0"/>
-              <a:t>7/2/2026</a:t>
+              <a:t>7/14/2026</a:t>
             </a:fld>
             <a:endParaRPr lang="en-US"/>
           </a:p>
@@ -2946,7 +2946,7 @@
           <a:p>
             <a:fld id="{6383FAE1-13DE-4511-8C1B-C8AFB720664C}" type="datetimeFigureOut">
               <a:rPr lang="en-US" smtClean="0"/>
-              <a:t>7/2/2026</a:t>
+              <a:t>7/14/2026</a:t>
             </a:fld>
             <a:endParaRPr lang="en-US"/>
           </a:p>
@@ -3257,7 +3257,7 @@
           <a:p>
             <a:fld id="{6383FAE1-13DE-4511-8C1B-C8AFB720664C}" type="datetimeFigureOut">
               <a:rPr lang="en-US" smtClean="0"/>
-              <a:t>7/2/2026</a:t>
+              <a:t>7/14/2026</a:t>
             </a:fld>
             <a:endParaRPr lang="en-US"/>
           </a:p>
@@ -3548,7 +3548,7 @@
           <a:p>
             <a:fld id="{6383FAE1-13DE-4511-8C1B-C8AFB720664C}" type="datetimeFigureOut">
               <a:rPr lang="en-US" smtClean="0"/>
-              <a:t>7/2/2026</a:t>
+              <a:t>7/14/2026</a:t>
             </a:fld>
             <a:endParaRPr lang="en-US"/>
           </a:p>
@@ -3792,7 +3792,7 @@
           <a:p>
             <a:fld id="{6383FAE1-13DE-4511-8C1B-C8AFB720664C}" type="datetimeFigureOut">
               <a:rPr lang="en-US" smtClean="0"/>
-              <a:t>7/2/2026</a:t>
+              <a:t>7/14/2026</a:t>
             </a:fld>
             <a:endParaRPr lang="en-US"/>
           </a:p>
@@ -4414,8 +4414,8 @@
         </p:nvSpPr>
         <p:spPr>
           <a:xfrm>
-            <a:off x="502920" y="1883326"/>
-            <a:ext cx="11177803" cy="3416320"/>
+            <a:off x="507098" y="1224958"/>
+            <a:ext cx="11177803" cy="1569660"/>
           </a:xfrm>
           <a:prstGeom prst="rect">
             <a:avLst/>
@@ -4440,71 +4440,7 @@
                   </a:schemeClr>
                 </a:solidFill>
               </a:rPr>
-              <a:t>Today we will understand </a:t>
-            </a:r>
-            <a:r>
-              <a:rPr lang="en-US" sz="2400" b="1" dirty="0">
-                <a:solidFill>
-                  <a:schemeClr val="accent6">
-                    <a:lumMod val="60000"/>
-                    <a:lumOff val="40000"/>
-                  </a:schemeClr>
-                </a:solidFill>
-              </a:rPr>
-              <a:t>how AI actually processes language</a:t>
-            </a:r>
-            <a:r>
-              <a:rPr lang="en-US" sz="2400" dirty="0">
-                <a:solidFill>
-                  <a:schemeClr val="accent6">
-                    <a:lumMod val="60000"/>
-                    <a:lumOff val="40000"/>
-                  </a:schemeClr>
-                </a:solidFill>
-              </a:rPr>
-              <a:t> and how to design better prompts.</a:t>
-            </a:r>
-          </a:p>
-          <a:p>
-            <a:pPr>
-              <a:buNone/>
-            </a:pPr>
-            <a:endParaRPr lang="en-US" sz="2400" dirty="0">
-              <a:solidFill>
-                <a:schemeClr val="accent6">
-                  <a:lumMod val="60000"/>
-                  <a:lumOff val="40000"/>
-                </a:schemeClr>
-              </a:solidFill>
-            </a:endParaRPr>
-          </a:p>
-          <a:p>
-            <a:pPr>
-              <a:buNone/>
-            </a:pPr>
-            <a:endParaRPr lang="en-US" sz="2400" dirty="0">
-              <a:solidFill>
-                <a:schemeClr val="accent6">
-                  <a:lumMod val="60000"/>
-                  <a:lumOff val="40000"/>
-                </a:schemeClr>
-              </a:solidFill>
-            </a:endParaRPr>
-          </a:p>
-          <a:p>
-            <a:pPr>
-              <a:buNone/>
-            </a:pPr>
-            <a:r>
-              <a:rPr lang="en-US" sz="2400" dirty="0">
-                <a:solidFill>
-                  <a:schemeClr val="accent6">
-                    <a:lumMod val="60000"/>
-                    <a:lumOff val="40000"/>
-                  </a:schemeClr>
-                </a:solidFill>
-              </a:rPr>
-              <a:t>Prompt engineering and optimization involve designing, testing, and refining input text (prompts) to guide AI models like LLMs to produce</a:t>
+              <a:t>Prompt engineering and optimization involve designing, testing, and refining input text (prompts) to guide AI models like LLMs to produce output that is</a:t>
             </a:r>
           </a:p>
           <a:p>
@@ -4538,25 +4474,263 @@
                   </a:schemeClr>
                 </a:solidFill>
               </a:rPr>
-              <a:t>relevant, and </a:t>
-            </a:r>
-          </a:p>
-          <a:p>
-            <a:pPr marL="342900" indent="-342900">
-              <a:buFont typeface="Arial" panose="020B0604020202020204" pitchFamily="34" charset="0"/>
-              <a:buChar char="•"/>
-            </a:pPr>
-            <a:r>
-              <a:rPr lang="en-US" sz="2400" dirty="0">
-                <a:solidFill>
-                  <a:schemeClr val="accent6">
-                    <a:lumMod val="60000"/>
-                    <a:lumOff val="40000"/>
-                  </a:schemeClr>
-                </a:solidFill>
-              </a:rPr>
-              <a:t>high-quality output</a:t>
-            </a:r>
+              <a:t>high-quality</a:t>
+            </a:r>
+          </a:p>
+        </p:txBody>
+      </p:sp>
+      <p:sp>
+        <p:nvSpPr>
+          <p:cNvPr id="2" name="Rectangle 1">
+            <a:extLst>
+              <a:ext uri="{FF2B5EF4-FFF2-40B4-BE49-F238E27FC236}">
+                <a16:creationId xmlns:a16="http://schemas.microsoft.com/office/drawing/2014/main" id="{FD37F8F9-E1A5-1EF5-0306-688B17BF7F71}"/>
+              </a:ext>
+            </a:extLst>
+          </p:cNvPr>
+          <p:cNvSpPr/>
+          <p:nvPr/>
+        </p:nvSpPr>
+        <p:spPr>
+          <a:xfrm>
+            <a:off x="4361688" y="3813048"/>
+            <a:ext cx="3154680" cy="1490472"/>
+          </a:xfrm>
+          <a:prstGeom prst="rect">
+            <a:avLst/>
+          </a:prstGeom>
+        </p:spPr>
+        <p:style>
+          <a:lnRef idx="2">
+            <a:schemeClr val="accent1">
+              <a:shade val="15000"/>
+            </a:schemeClr>
+          </a:lnRef>
+          <a:fillRef idx="1">
+            <a:schemeClr val="accent1"/>
+          </a:fillRef>
+          <a:effectRef idx="0">
+            <a:schemeClr val="accent1"/>
+          </a:effectRef>
+          <a:fontRef idx="minor">
+            <a:schemeClr val="lt1"/>
+          </a:fontRef>
+        </p:style>
+        <p:txBody>
+          <a:bodyPr rtlCol="0" anchor="ctr"/>
+          <a:lstStyle/>
+          <a:p>
+            <a:pPr algn="ctr"/>
+            <a:r>
+              <a:rPr lang="en-US" sz="2400" dirty="0"/>
+              <a:t>LLM</a:t>
+            </a:r>
+          </a:p>
+          <a:p>
+            <a:pPr algn="ctr"/>
+            <a:r>
+              <a:rPr lang="en-US" sz="2400" dirty="0"/>
+              <a:t>(ChatGPT, Gemini, Claude AI, </a:t>
+            </a:r>
+            <a:r>
+              <a:rPr lang="en-US" sz="2400" dirty="0" err="1"/>
+              <a:t>etc</a:t>
+            </a:r>
+            <a:r>
+              <a:rPr lang="en-US" sz="2400" dirty="0"/>
+              <a:t>)</a:t>
+            </a:r>
+          </a:p>
+        </p:txBody>
+      </p:sp>
+      <p:sp>
+        <p:nvSpPr>
+          <p:cNvPr id="3" name="Arrow: Right 2">
+            <a:extLst>
+              <a:ext uri="{FF2B5EF4-FFF2-40B4-BE49-F238E27FC236}">
+                <a16:creationId xmlns:a16="http://schemas.microsoft.com/office/drawing/2014/main" id="{F152CAF7-63FF-9D4F-627B-E71F0244D650}"/>
+              </a:ext>
+            </a:extLst>
+          </p:cNvPr>
+          <p:cNvSpPr/>
+          <p:nvPr/>
+        </p:nvSpPr>
+        <p:spPr>
+          <a:xfrm>
+            <a:off x="2807208" y="4206240"/>
+            <a:ext cx="1188720" cy="640080"/>
+          </a:xfrm>
+          <a:prstGeom prst="rightArrow">
+            <a:avLst/>
+          </a:prstGeom>
+        </p:spPr>
+        <p:style>
+          <a:lnRef idx="2">
+            <a:schemeClr val="accent1">
+              <a:shade val="15000"/>
+            </a:schemeClr>
+          </a:lnRef>
+          <a:fillRef idx="1">
+            <a:schemeClr val="accent1"/>
+          </a:fillRef>
+          <a:effectRef idx="0">
+            <a:schemeClr val="accent1"/>
+          </a:effectRef>
+          <a:fontRef idx="minor">
+            <a:schemeClr val="lt1"/>
+          </a:fontRef>
+        </p:style>
+        <p:txBody>
+          <a:bodyPr rtlCol="0" anchor="ctr"/>
+          <a:lstStyle/>
+          <a:p>
+            <a:pPr algn="ctr"/>
+            <a:endParaRPr lang="en-US"/>
+          </a:p>
+        </p:txBody>
+      </p:sp>
+      <p:sp>
+        <p:nvSpPr>
+          <p:cNvPr id="5" name="Arrow: Right 4">
+            <a:extLst>
+              <a:ext uri="{FF2B5EF4-FFF2-40B4-BE49-F238E27FC236}">
+                <a16:creationId xmlns:a16="http://schemas.microsoft.com/office/drawing/2014/main" id="{A56796D8-0137-50C5-5868-116E7CB1A337}"/>
+              </a:ext>
+            </a:extLst>
+          </p:cNvPr>
+          <p:cNvSpPr/>
+          <p:nvPr/>
+        </p:nvSpPr>
+        <p:spPr>
+          <a:xfrm>
+            <a:off x="7729728" y="4130040"/>
+            <a:ext cx="1130808" cy="640080"/>
+          </a:xfrm>
+          <a:prstGeom prst="rightArrow">
+            <a:avLst/>
+          </a:prstGeom>
+        </p:spPr>
+        <p:style>
+          <a:lnRef idx="2">
+            <a:schemeClr val="accent1">
+              <a:shade val="15000"/>
+            </a:schemeClr>
+          </a:lnRef>
+          <a:fillRef idx="1">
+            <a:schemeClr val="accent1"/>
+          </a:fillRef>
+          <a:effectRef idx="0">
+            <a:schemeClr val="accent1"/>
+          </a:effectRef>
+          <a:fontRef idx="minor">
+            <a:schemeClr val="lt1"/>
+          </a:fontRef>
+        </p:style>
+        <p:txBody>
+          <a:bodyPr rtlCol="0" anchor="ctr"/>
+          <a:lstStyle/>
+          <a:p>
+            <a:pPr algn="ctr"/>
+            <a:endParaRPr lang="en-US"/>
+          </a:p>
+        </p:txBody>
+      </p:sp>
+      <p:sp>
+        <p:nvSpPr>
+          <p:cNvPr id="6" name="Oval 5">
+            <a:extLst>
+              <a:ext uri="{FF2B5EF4-FFF2-40B4-BE49-F238E27FC236}">
+                <a16:creationId xmlns:a16="http://schemas.microsoft.com/office/drawing/2014/main" id="{1BA1EE3B-13A3-01FA-407E-6CA0BC9E9992}"/>
+              </a:ext>
+            </a:extLst>
+          </p:cNvPr>
+          <p:cNvSpPr/>
+          <p:nvPr/>
+        </p:nvSpPr>
+        <p:spPr>
+          <a:xfrm>
+            <a:off x="777240" y="3933444"/>
+            <a:ext cx="1664208" cy="1033272"/>
+          </a:xfrm>
+          <a:prstGeom prst="ellipse">
+            <a:avLst/>
+          </a:prstGeom>
+        </p:spPr>
+        <p:style>
+          <a:lnRef idx="2">
+            <a:schemeClr val="accent1">
+              <a:shade val="15000"/>
+            </a:schemeClr>
+          </a:lnRef>
+          <a:fillRef idx="1">
+            <a:schemeClr val="accent1"/>
+          </a:fillRef>
+          <a:effectRef idx="0">
+            <a:schemeClr val="accent1"/>
+          </a:effectRef>
+          <a:fontRef idx="minor">
+            <a:schemeClr val="lt1"/>
+          </a:fontRef>
+        </p:style>
+        <p:txBody>
+          <a:bodyPr rtlCol="0" anchor="ctr"/>
+          <a:lstStyle/>
+          <a:p>
+            <a:pPr algn="ctr"/>
+            <a:r>
+              <a:rPr lang="en-US" dirty="0"/>
+              <a:t>Prompt</a:t>
+            </a:r>
+          </a:p>
+        </p:txBody>
+      </p:sp>
+      <p:sp>
+        <p:nvSpPr>
+          <p:cNvPr id="9" name="Oval 8">
+            <a:extLst>
+              <a:ext uri="{FF2B5EF4-FFF2-40B4-BE49-F238E27FC236}">
+                <a16:creationId xmlns:a16="http://schemas.microsoft.com/office/drawing/2014/main" id="{45871A8B-AC69-4DB3-3EA0-FB268C1A9952}"/>
+              </a:ext>
+            </a:extLst>
+          </p:cNvPr>
+          <p:cNvSpPr/>
+          <p:nvPr/>
+        </p:nvSpPr>
+        <p:spPr>
+          <a:xfrm>
+            <a:off x="9168384" y="3933444"/>
+            <a:ext cx="1664208" cy="1033272"/>
+          </a:xfrm>
+          <a:prstGeom prst="ellipse">
+            <a:avLst/>
+          </a:prstGeom>
+        </p:spPr>
+        <p:style>
+          <a:lnRef idx="2">
+            <a:schemeClr val="accent1">
+              <a:shade val="15000"/>
+            </a:schemeClr>
+          </a:lnRef>
+          <a:fillRef idx="1">
+            <a:schemeClr val="accent1"/>
+          </a:fillRef>
+          <a:effectRef idx="0">
+            <a:schemeClr val="accent1"/>
+          </a:effectRef>
+          <a:fontRef idx="minor">
+            <a:schemeClr val="lt1"/>
+          </a:fontRef>
+        </p:style>
+        <p:txBody>
+          <a:bodyPr rtlCol="0" anchor="ctr"/>
+          <a:lstStyle/>
+          <a:p>
+            <a:pPr algn="ctr"/>
+            <a:r>
+              <a:rPr lang="en-US"/>
+              <a:t>Output</a:t>
+            </a:r>
+            <a:endParaRPr lang="en-US" dirty="0"/>
           </a:p>
         </p:txBody>
       </p:sp>
